--- a/examples/results-rppa/report.pptx
+++ b/examples/results-rppa/report.pptx
@@ -17,6 +17,7 @@
     <p:sldId id="259" r:id="rId11"/>
     <p:sldId id="260" r:id="rId12"/>
     <p:sldId id="261" r:id="rId13"/>
+    <p:sldId id="262" r:id="rId14"/>
   </p:sldIdLst>
   <p:sldSz cx="9144000" cy="6858000" type="screen4x3"/>
   <p:notesSz cx="6858000" cy="9144000"/>
@@ -1937,7 +1938,7 @@
             <a:pPr lvl="1"/>
             <a:r>
               <a:rPr/>
-              <a:t>Data was prenormalized</a:t>
+              <a:t>Data was prenormalized and transformed to log2 space</a:t>
             </a:r>
           </a:p>
           <a:p>
@@ -1951,7 +1952,7 @@
             <a:pPr lvl="1"/>
             <a:r>
               <a:rPr/>
-              <a:t>t-test</a:t>
+              <a:t>t-test (2 tailed, assuming unequal variance)</a:t>
             </a:r>
           </a:p>
           <a:p>
@@ -2193,7 +2194,7 @@
           <a:p>
             <a:r>
               <a:rPr/>
-              <a:t>Normalized PCA</a:t>
+              <a:t>Log2 Transformed PCA</a:t>
             </a:r>
           </a:p>
         </p:txBody>
@@ -2220,7 +2221,7 @@
           <a:p>
             <a:r>
               <a:rPr/>
-              <a:t>Raw PCA</a:t>
+              <a:t>Prenormalized PCA</a:t>
             </a:r>
           </a:p>
         </p:txBody>
@@ -2262,7 +2263,7 @@
           </p:nvPr>
         </p:nvPicPr>
         <p:blipFill>
-          <a:blip cstate="print" r:embed="rId2"/>
+          <a:blip cstate="print" r:embed="rId3"/>
           <a:stretch>
             <a:fillRect/>
           </a:stretch>
@@ -2286,6 +2287,84 @@
 </file>
 
 <file path=ppt/slides/slide6.xml><?xml version="1.0" encoding="utf-8"?>
+<p:sld xmlns:a="http://schemas.openxmlformats.org/drawingml/2006/main" xmlns:r="http://schemas.openxmlformats.org/officeDocument/2006/relationships" xmlns:p="http://schemas.openxmlformats.org/presentationml/2006/main">
+  <p:cSld>
+    <p:spTree>
+      <p:nvGrpSpPr>
+        <p:cNvPr id="1" name=""/>
+        <p:cNvGrpSpPr/>
+        <p:nvPr/>
+      </p:nvGrpSpPr>
+      <p:grpSpPr>
+        <a:xfrm>
+          <a:off x="0" y="0"/>
+          <a:ext cx="0" cy="0"/>
+          <a:chOff x="0" y="0"/>
+          <a:chExt cx="0" cy="0"/>
+        </a:xfrm>
+      </p:grpSpPr>
+      <p:sp>
+        <p:nvSpPr>
+          <p:cNvPr id="2" name="Title 1"/>
+          <p:cNvSpPr>
+            <a:spLocks noGrp="1"/>
+          </p:cNvSpPr>
+          <p:nvPr>
+            <p:ph type="title"/>
+          </p:nvPr>
+        </p:nvSpPr>
+        <p:spPr>
+          <a:xfrm>
+            <a:off x="457200" y="6283"/>
+            <a:ext cx="8229600" cy="659640"/>
+          </a:xfrm>
+        </p:spPr>
+        <p:txBody>
+          <a:bodyPr/>
+          <a:lstStyle/>
+          <a:p>
+            <a:r>
+              <a:rPr/>
+              <a:t>Comparison WT_7d_MC_CO_over_CO_CO</a:t>
+            </a:r>
+          </a:p>
+        </p:txBody>
+      </p:sp>
+      <p:pic>
+        <p:nvPicPr>
+          <p:cNvPr id="3" name="" descr=""/>
+          <p:cNvPicPr>
+            <a:picLocks noGrp="1"/>
+          </p:cNvPicPr>
+          <p:nvPr>
+            <p:ph/>
+          </p:nvPr>
+        </p:nvPicPr>
+        <p:blipFill>
+          <a:blip cstate="print" r:embed="rId2"/>
+          <a:stretch>
+            <a:fillRect/>
+          </a:stretch>
+        </p:blipFill>
+        <p:spPr>
+          <a:xfrm>
+            <a:off x="457200" y="914400"/>
+            <a:ext cx="4572000" cy="4572000"/>
+          </a:xfrm>
+          <a:prstGeom prst="rect">
+            <a:avLst/>
+          </a:prstGeom>
+        </p:spPr>
+      </p:pic>
+    </p:spTree>
+  </p:cSld>
+  <p:clrMapOvr>
+    <a:masterClrMapping/>
+  </p:clrMapOvr>
+</p:sld>
+</file>
+
+<file path=ppt/slides/slide7.xml><?xml version="1.0" encoding="utf-8"?>
 <p:sld xmlns:a="http://schemas.openxmlformats.org/drawingml/2006/main" xmlns:r="http://schemas.openxmlformats.org/officeDocument/2006/relationships" xmlns:p="http://schemas.openxmlformats.org/presentationml/2006/main">
   <p:cSld>
     <p:spTree>
